--- a/assets/pptx/catalog-675.pptx
+++ b/assets/pptx/catalog-675.pptx
@@ -3318,7 +3318,7 @@
                 <a:ea typeface="Ebrima"/>
                 <a:cs typeface="Ebrima"/>
               </a:rPr>
-              <a:t>ምሥጋና እና አምልኮዬ ማደሪያህ ይግባ (2x)</a:t>
+              <a:t>ምሥጋና እና አምልኮዬ ማደሪያህ ይግባ 2x</a:t>
             </a:r>
           </a:p>
           <a:p>
@@ -3354,7 +3354,7 @@
                 <a:ea typeface="Ebrima"/>
                 <a:cs typeface="Ebrima"/>
               </a:rPr>
-              <a:t>ምሥጋና እና አምልኮዬ ማደሪያህ ይድረስ (2x)</a:t>
+              <a:t>ምሥጋና እና አምልኮዬ ማደሪያህ ይድረስ 2x</a:t>
             </a:r>
           </a:p>
         </p:txBody>
@@ -3457,7 +3457,7 @@
                 <a:ea typeface="Ebrima"/>
                 <a:cs typeface="Ebrima"/>
               </a:rPr>
-              <a:t>እሺ አላለኝም (2x)</a:t>
+              <a:t>እሺ አላለኝም 2x</a:t>
             </a:r>
           </a:p>
           <a:p>
@@ -3493,7 +3493,7 @@
                 <a:ea typeface="Ebrima"/>
                 <a:cs typeface="Ebrima"/>
               </a:rPr>
-              <a:t>ምሥጋና እና አምልኮዬ ማደሪያህ ይግባ (2x)</a:t>
+              <a:t>ምሥጋና እና አምልኮዬ ማደሪያህ ይግባ 2x</a:t>
             </a:r>
           </a:p>
         </p:txBody>
